--- a/Week 2/Week2Slides.pptx
+++ b/Week 2/Week2Slides.pptx
@@ -305,7 +305,7 @@
       </p15:sldGuideLst>
     </p:ext>
     <p:ext uri="http://customooxmlschemas.google.com/">
-      <go:slidesCustomData xmlns="" xmlns:go="http://customooxmlschemas.google.com/" xmlns:ahyp="http://schemas.microsoft.com/office/drawing/2018/hyperlinkcolor" xmlns:p15="http://schemas.microsoft.com/office/powerpoint/2012/main" xmlns:p14="http://schemas.microsoft.com/office/powerpoint/2010/main" xmlns:com="http://schemas.openxmlformats.org/drawingml/2006/compatibility" xmlns:pvml="urn:schemas-microsoft-com:office:powerpoint" xmlns:v="urn:schemas-microsoft-com:vml" xmlns:o="urn:schemas-microsoft-com:office:office" xmlns:dgm="http://schemas.openxmlformats.org/drawingml/2006/diagram" xmlns:c="http://schemas.openxmlformats.org/drawingml/2006/chart" xmlns:mv="urn:schemas-microsoft-com:mac:vml" xmlns:mc="http://schemas.openxmlformats.org/markup-compatibility/2006" r:id="rId52" roundtripDataSignature="AMtx7mghOQz3N+IJLEEDvca6E4sM8UT8qw=="/>
+      <go:slidesCustomData xmlns:mc="http://schemas.openxmlformats.org/markup-compatibility/2006" xmlns:mv="urn:schemas-microsoft-com:mac:vml" xmlns:c="http://schemas.openxmlformats.org/drawingml/2006/chart" xmlns:dgm="http://schemas.openxmlformats.org/drawingml/2006/diagram" xmlns:o="urn:schemas-microsoft-com:office:office" xmlns:v="urn:schemas-microsoft-com:vml" xmlns:pvml="urn:schemas-microsoft-com:office:powerpoint" xmlns:com="http://schemas.openxmlformats.org/drawingml/2006/compatibility" xmlns:p14="http://schemas.microsoft.com/office/powerpoint/2010/main" xmlns:p15="http://schemas.microsoft.com/office/powerpoint/2012/main" xmlns:ahyp="http://schemas.microsoft.com/office/drawing/2018/hyperlinkcolor" xmlns:go="http://customooxmlschemas.google.com/" xmlns="" r:id="rId52" roundtripDataSignature="AMtx7mghOQz3N+IJLEEDvca6E4sM8UT8qw=="/>
     </p:ext>
   </p:extLst>
 </p:presentation>
@@ -15200,10 +15200,10 @@
               <a:buNone/>
             </a:pPr>
             <a:r>
-              <a:rPr lang="en"/>
+              <a:rPr lang="en" dirty="0"/>
               <a:t>Exercise 1</a:t>
             </a:r>
-            <a:endParaRPr/>
+            <a:endParaRPr dirty="0"/>
           </a:p>
         </p:txBody>
       </p:sp>
@@ -15250,10 +15250,10 @@
               <a:buNone/>
             </a:pPr>
             <a:r>
-              <a:rPr lang="en"/>
+              <a:rPr lang="en" dirty="0"/>
               <a:t>Given ex1-Page1.html, build ex1-Page2.html and ex1-Page3.html such that</a:t>
             </a:r>
-            <a:endParaRPr/>
+            <a:endParaRPr dirty="0"/>
           </a:p>
           <a:p>
             <a:pPr marL="457200" lvl="0" indent="-317500" algn="l" rtl="0">
@@ -15270,10 +15270,10 @@
               <a:buChar char="●"/>
             </a:pPr>
             <a:r>
-              <a:rPr lang="en"/>
+              <a:rPr lang="en" dirty="0"/>
               <a:t>They have the same appearance as ex1-Page1.html.</a:t>
             </a:r>
-            <a:endParaRPr/>
+            <a:endParaRPr dirty="0"/>
           </a:p>
           <a:p>
             <a:pPr marL="457200" lvl="0" indent="-317500" algn="l" rtl="0">
@@ -15290,11 +15290,11 @@
               <a:buChar char="●"/>
             </a:pPr>
             <a:r>
-              <a:rPr lang="en"/>
+              <a:rPr lang="en" dirty="0"/>
               <a:t>ex1-Page2.html uses </a:t>
             </a:r>
             <a:r>
-              <a:rPr lang="en">
+              <a:rPr lang="en" dirty="0">
                 <a:solidFill>
                   <a:srgbClr val="0070C0"/>
                 </a:solidFill>
@@ -15302,10 +15302,10 @@
               <a:t>inline style sheet</a:t>
             </a:r>
             <a:r>
-              <a:rPr lang="en"/>
+              <a:rPr lang="en" dirty="0"/>
               <a:t>. </a:t>
             </a:r>
-            <a:endParaRPr/>
+            <a:endParaRPr dirty="0"/>
           </a:p>
           <a:p>
             <a:pPr marL="457200" lvl="0" indent="-317500" algn="l" rtl="0">
@@ -15322,11 +15322,11 @@
               <a:buChar char="●"/>
             </a:pPr>
             <a:r>
-              <a:rPr lang="en"/>
+              <a:rPr lang="en" dirty="0"/>
               <a:t>ex1-Page3.html uses </a:t>
             </a:r>
             <a:r>
-              <a:rPr lang="en">
+              <a:rPr lang="en" dirty="0">
                 <a:solidFill>
                   <a:srgbClr val="0070C0"/>
                 </a:solidFill>
@@ -15334,10 +15334,10 @@
               <a:t>external style sheet </a:t>
             </a:r>
             <a:r>
-              <a:rPr lang="en"/>
+              <a:rPr lang="en" dirty="0"/>
               <a:t>only. </a:t>
             </a:r>
-            <a:endParaRPr/>
+            <a:endParaRPr dirty="0"/>
           </a:p>
         </p:txBody>
       </p:sp>
